--- a/docs/fnl-rules-and-prompts.pptx
+++ b/docs/fnl-rules-and-prompts.pptx
@@ -3268,7 +3268,7 @@
     <p:bg>
       <p:bgPr>
         <a:solidFill>
-          <a:srgbClr val="FFFFFF"/>
+          <a:srgbClr val="F3F4F6"/>
         </a:solidFill>
         <a:effectLst/>
       </p:bgPr>
@@ -3527,7 +3527,7 @@
     <p:bg>
       <p:bgPr>
         <a:solidFill>
-          <a:srgbClr val="FFFFFF"/>
+          <a:srgbClr val="F3F4F6"/>
         </a:solidFill>
         <a:effectLst/>
       </p:bgPr>
@@ -4326,7 +4326,7 @@
     <p:bg>
       <p:bgPr>
         <a:solidFill>
-          <a:srgbClr val="FFFFFF"/>
+          <a:srgbClr val="F3F4F6"/>
         </a:solidFill>
         <a:effectLst/>
       </p:bgPr>
@@ -5194,7 +5194,7 @@
     <p:bg>
       <p:bgPr>
         <a:solidFill>
-          <a:srgbClr val="FFFFFF"/>
+          <a:srgbClr val="F3F4F6"/>
         </a:solidFill>
         <a:effectLst/>
       </p:bgPr>
@@ -6123,7 +6123,7 @@
     <p:bg>
       <p:bgPr>
         <a:solidFill>
-          <a:srgbClr val="FFFFFF"/>
+          <a:srgbClr val="F3F4F6"/>
         </a:solidFill>
         <a:effectLst/>
       </p:bgPr>
@@ -6500,7 +6500,7 @@
     <p:bg>
       <p:bgPr>
         <a:solidFill>
-          <a:srgbClr val="FFFFFF"/>
+          <a:srgbClr val="F3F4F6"/>
         </a:solidFill>
         <a:effectLst/>
       </p:bgPr>
@@ -6987,7 +6987,7 @@
     <p:bg>
       <p:bgPr>
         <a:solidFill>
-          <a:srgbClr val="FFFFFF"/>
+          <a:srgbClr val="F3F4F6"/>
         </a:solidFill>
         <a:effectLst/>
       </p:bgPr>
@@ -7234,7 +7234,7 @@
     <p:bg>
       <p:bgPr>
         <a:solidFill>
-          <a:srgbClr val="FFFFFF"/>
+          <a:srgbClr val="F3F4F6"/>
         </a:solidFill>
         <a:effectLst/>
       </p:bgPr>
@@ -7569,7 +7569,7 @@
     <p:bg>
       <p:bgPr>
         <a:solidFill>
-          <a:srgbClr val="FFFFFF"/>
+          <a:srgbClr val="F3F4F6"/>
         </a:solidFill>
         <a:effectLst/>
       </p:bgPr>
@@ -7962,7 +7962,7 @@
     <p:bg>
       <p:bgPr>
         <a:solidFill>
-          <a:srgbClr val="FFFFFF"/>
+          <a:srgbClr val="F3F4F6"/>
         </a:solidFill>
         <a:effectLst/>
       </p:bgPr>
@@ -8360,7 +8360,7 @@
     <p:bg>
       <p:bgPr>
         <a:solidFill>
-          <a:srgbClr val="FFFFFF"/>
+          <a:srgbClr val="F3F4F6"/>
         </a:solidFill>
         <a:effectLst/>
       </p:bgPr>
@@ -8744,7 +8744,7 @@
     <p:bg>
       <p:bgPr>
         <a:solidFill>
-          <a:srgbClr val="FFFFFF"/>
+          <a:srgbClr val="F3F4F6"/>
         </a:solidFill>
         <a:effectLst/>
       </p:bgPr>
@@ -9352,7 +9352,7 @@
     <p:bg>
       <p:bgPr>
         <a:solidFill>
-          <a:srgbClr val="FFFFFF"/>
+          <a:srgbClr val="F3F4F6"/>
         </a:solidFill>
         <a:effectLst/>
       </p:bgPr>
@@ -9960,7 +9960,7 @@
     <p:bg>
       <p:bgPr>
         <a:solidFill>
-          <a:srgbClr val="FFFFFF"/>
+          <a:srgbClr val="F3F4F6"/>
         </a:solidFill>
         <a:effectLst/>
       </p:bgPr>
@@ -10252,7 +10252,7 @@
     <p:bg>
       <p:bgPr>
         <a:solidFill>
-          <a:srgbClr val="FFFFFF"/>
+          <a:srgbClr val="F3F4F6"/>
         </a:solidFill>
         <a:effectLst/>
       </p:bgPr>

--- a/docs/fnl-rules-and-prompts.pptx
+++ b/docs/fnl-rules-and-prompts.pptx
@@ -8415,8 +8415,8 @@
         </p:nvSpPr>
         <p:spPr>
           <a:xfrm>
-            <a:off x="2743200" y="1280160"/>
-            <a:ext cx="7315200" cy="822960"/>
+            <a:off x="2468880" y="1188720"/>
+            <a:ext cx="7315200" cy="868680"/>
           </a:xfrm>
           <a:prstGeom prst="roundRect">
             <a:avLst/>
@@ -8479,8 +8479,8 @@
         </p:nvSpPr>
         <p:spPr>
           <a:xfrm>
-            <a:off x="6126480" y="2103120"/>
-            <a:ext cx="548640" cy="457200"/>
+            <a:off x="5852160" y="2057400"/>
+            <a:ext cx="548640" cy="567890"/>
           </a:xfrm>
           <a:prstGeom prst="rect">
             <a:avLst/>
@@ -8514,8 +8514,8 @@
         </p:nvSpPr>
         <p:spPr>
           <a:xfrm>
-            <a:off x="2743200" y="2697480"/>
-            <a:ext cx="7315200" cy="822960"/>
+            <a:off x="2468880" y="2625290"/>
+            <a:ext cx="7315200" cy="868680"/>
           </a:xfrm>
           <a:prstGeom prst="roundRect">
             <a:avLst/>
@@ -8578,8 +8578,8 @@
         </p:nvSpPr>
         <p:spPr>
           <a:xfrm>
-            <a:off x="6126480" y="3520440"/>
-            <a:ext cx="548640" cy="457200"/>
+            <a:off x="5852160" y="3493970"/>
+            <a:ext cx="548640" cy="567890"/>
           </a:xfrm>
           <a:prstGeom prst="rect">
             <a:avLst/>
@@ -8613,8 +8613,8 @@
         </p:nvSpPr>
         <p:spPr>
           <a:xfrm>
-            <a:off x="2743200" y="4114800"/>
-            <a:ext cx="7315200" cy="822960"/>
+            <a:off x="2468880" y="4061860"/>
+            <a:ext cx="7315200" cy="868680"/>
           </a:xfrm>
           <a:prstGeom prst="roundRect">
             <a:avLst/>
